--- a/public/fun/pack/pptx/news/카드뉴스_04_감사·칭찬_제주유채밭.pptx
+++ b/public/fun/pack/pptx/news/카드뉴스_04_감사·칭찬_제주유채밭.pptx
@@ -3348,7 +3348,7 @@
             <a:r>
               <a:rPr sz="3000" b="1" i="0">
                 <a:solidFill>
-                  <a:srgbClr val="605610"/>
+                  <a:srgbClr val="72671D"/>
                 </a:solidFill>
               </a:rPr>
               <a:t>오늘 고마웠던 일 세 가지 적기</a:t>
@@ -3386,7 +3386,7 @@
             <a:r>
               <a:rPr sz="1500" b="0" i="1">
                 <a:solidFill>
-                  <a:srgbClr val="605610"/>
+                  <a:srgbClr val="72671D"/>
                 </a:solidFill>
               </a:rPr>
               <a:t>옆으로 넘겨 보세요 →</a:t>
@@ -3473,7 +3473,7 @@
             <a:avLst/>
           </a:prstGeom>
           <a:solidFill>
-            <a:srgbClr val="B8A41E"/>
+            <a:srgbClr val="DFC93A"/>
           </a:solidFill>
           <a:ln>
             <a:noFill/>
@@ -3555,7 +3555,7 @@
             <a:r>
               <a:rPr sz="6600" b="1" i="0">
                 <a:solidFill>
-                  <a:srgbClr val="B8A41E"/>
+                  <a:srgbClr val="DFC93A"/>
                 </a:solidFill>
               </a:rPr>
               <a:t>01</a:t>
@@ -3680,7 +3680,7 @@
             <a:avLst/>
           </a:prstGeom>
           <a:solidFill>
-            <a:srgbClr val="B8A41E"/>
+            <a:srgbClr val="DFC93A"/>
           </a:solidFill>
           <a:ln>
             <a:noFill/>
@@ -3762,7 +3762,7 @@
             <a:r>
               <a:rPr sz="6600" b="1" i="0">
                 <a:solidFill>
-                  <a:srgbClr val="B8A41E"/>
+                  <a:srgbClr val="DFC93A"/>
                 </a:solidFill>
               </a:rPr>
               <a:t>02</a:t>
@@ -3887,7 +3887,7 @@
             <a:avLst/>
           </a:prstGeom>
           <a:solidFill>
-            <a:srgbClr val="B8A41E"/>
+            <a:srgbClr val="DFC93A"/>
           </a:solidFill>
           <a:ln>
             <a:noFill/>
@@ -3969,7 +3969,7 @@
             <a:r>
               <a:rPr sz="6600" b="1" i="0">
                 <a:solidFill>
-                  <a:srgbClr val="B8A41E"/>
+                  <a:srgbClr val="DFC93A"/>
                 </a:solidFill>
               </a:rPr>
               <a:t>03</a:t>
@@ -4094,7 +4094,7 @@
             <a:avLst/>
           </a:prstGeom>
           <a:solidFill>
-            <a:srgbClr val="B8A41E"/>
+            <a:srgbClr val="DFC93A"/>
           </a:solidFill>
           <a:ln>
             <a:noFill/>
@@ -4176,7 +4176,7 @@
             <a:r>
               <a:rPr sz="6600" b="1" i="0">
                 <a:solidFill>
-                  <a:srgbClr val="B8A41E"/>
+                  <a:srgbClr val="DFC93A"/>
                 </a:solidFill>
               </a:rPr>
               <a:t>04</a:t>
@@ -4301,7 +4301,7 @@
             <a:avLst/>
           </a:prstGeom>
           <a:solidFill>
-            <a:srgbClr val="B8A41E"/>
+            <a:srgbClr val="DFC93A"/>
           </a:solidFill>
           <a:ln>
             <a:noFill/>
@@ -4383,7 +4383,7 @@
             <a:r>
               <a:rPr sz="6600" b="1" i="0">
                 <a:solidFill>
-                  <a:srgbClr val="B8A41E"/>
+                  <a:srgbClr val="DFC93A"/>
                 </a:solidFill>
               </a:rPr>
               <a:t>05</a:t>
@@ -4539,7 +4539,7 @@
             <a:r>
               <a:rPr sz="2800" b="1" i="0">
                 <a:solidFill>
-                  <a:srgbClr val="605610"/>
+                  <a:srgbClr val="72671D"/>
                 </a:solidFill>
               </a:rPr>
               <a:t>저장해 두고 필요할 때 꺼내 보세요</a:t>
@@ -4577,7 +4577,7 @@
             <a:r>
               <a:rPr sz="1500" b="0" i="1">
                 <a:solidFill>
-                  <a:srgbClr val="605610"/>
+                  <a:srgbClr val="72671D"/>
                 </a:solidFill>
               </a:rPr>
               <a:t>마음에 들면 공유해 주세요</a:t>
@@ -4642,34 +4642,34 @@
         <a:sysClr val="window" lastClr="FFFFFF"/>
       </a:lt1>
       <a:dk2>
-        <a:srgbClr val="605610"/>
+        <a:srgbClr val="72671D"/>
       </a:dk2>
       <a:lt2>
-        <a:srgbClr val="FCFAED"/>
+        <a:srgbClr val="FCFBF3"/>
       </a:lt2>
       <a:accent1>
-        <a:srgbClr val="B8A41E"/>
+        <a:srgbClr val="DFC93A"/>
       </a:accent1>
       <a:accent2>
-        <a:srgbClr val="3B7191"/>
+        <a:srgbClr val="339941"/>
       </a:accent2>
       <a:accent3>
-        <a:srgbClr val="605610"/>
+        <a:srgbClr val="72671D"/>
       </a:accent3>
       <a:accent4>
-        <a:srgbClr val="F8F2C9"/>
+        <a:srgbClr val="F7F3D4"/>
       </a:accent4>
       <a:accent5>
-        <a:srgbClr val="7A8A58"/>
+        <a:srgbClr val="89B13E"/>
       </a:accent5>
       <a:accent6>
-        <a:srgbClr val="A09A70"/>
+        <a:srgbClr val="AAA477"/>
       </a:accent6>
       <a:hlink>
-        <a:srgbClr val="B8A41E"/>
+        <a:srgbClr val="DFC93A"/>
       </a:hlink>
       <a:folHlink>
-        <a:srgbClr val="605610"/>
+        <a:srgbClr val="72671D"/>
       </a:folHlink>
     </a:clrScheme>
     <a:fontScheme name="Office">
